--- a/print/PKM.pptx
+++ b/print/PKM.pptx
@@ -6340,7 +6340,7 @@
           <a:p>
             <a:fld id="{9D6CC3B2-6B86-4605-AF63-16CB75CF6450}" type="datetimeFigureOut">
               <a:rPr lang="en-US" smtClean="0"/>
-              <a:t>8/20/2025</a:t>
+              <a:t>7/19/2026</a:t>
             </a:fld>
             <a:endParaRPr lang="en-US"/>
           </a:p>
@@ -6510,7 +6510,7 @@
           <a:p>
             <a:fld id="{9D6CC3B2-6B86-4605-AF63-16CB75CF6450}" type="datetimeFigureOut">
               <a:rPr lang="en-US" smtClean="0"/>
-              <a:t>8/20/2025</a:t>
+              <a:t>7/19/2026</a:t>
             </a:fld>
             <a:endParaRPr lang="en-US"/>
           </a:p>
@@ -6690,7 +6690,7 @@
           <a:p>
             <a:fld id="{9D6CC3B2-6B86-4605-AF63-16CB75CF6450}" type="datetimeFigureOut">
               <a:rPr lang="en-US" smtClean="0"/>
-              <a:t>8/20/2025</a:t>
+              <a:t>7/19/2026</a:t>
             </a:fld>
             <a:endParaRPr lang="en-US"/>
           </a:p>
@@ -6860,7 +6860,7 @@
           <a:p>
             <a:fld id="{9D6CC3B2-6B86-4605-AF63-16CB75CF6450}" type="datetimeFigureOut">
               <a:rPr lang="en-US" smtClean="0"/>
-              <a:t>8/20/2025</a:t>
+              <a:t>7/19/2026</a:t>
             </a:fld>
             <a:endParaRPr lang="en-US"/>
           </a:p>
@@ -7106,7 +7106,7 @@
           <a:p>
             <a:fld id="{9D6CC3B2-6B86-4605-AF63-16CB75CF6450}" type="datetimeFigureOut">
               <a:rPr lang="en-US" smtClean="0"/>
-              <a:t>8/20/2025</a:t>
+              <a:t>7/19/2026</a:t>
             </a:fld>
             <a:endParaRPr lang="en-US"/>
           </a:p>
@@ -7338,7 +7338,7 @@
           <a:p>
             <a:fld id="{9D6CC3B2-6B86-4605-AF63-16CB75CF6450}" type="datetimeFigureOut">
               <a:rPr lang="en-US" smtClean="0"/>
-              <a:t>8/20/2025</a:t>
+              <a:t>7/19/2026</a:t>
             </a:fld>
             <a:endParaRPr lang="en-US"/>
           </a:p>
@@ -7705,7 +7705,7 @@
           <a:p>
             <a:fld id="{9D6CC3B2-6B86-4605-AF63-16CB75CF6450}" type="datetimeFigureOut">
               <a:rPr lang="en-US" smtClean="0"/>
-              <a:t>8/20/2025</a:t>
+              <a:t>7/19/2026</a:t>
             </a:fld>
             <a:endParaRPr lang="en-US"/>
           </a:p>
@@ -7823,7 +7823,7 @@
           <a:p>
             <a:fld id="{9D6CC3B2-6B86-4605-AF63-16CB75CF6450}" type="datetimeFigureOut">
               <a:rPr lang="en-US" smtClean="0"/>
-              <a:t>8/20/2025</a:t>
+              <a:t>7/19/2026</a:t>
             </a:fld>
             <a:endParaRPr lang="en-US"/>
           </a:p>
@@ -7918,7 +7918,7 @@
           <a:p>
             <a:fld id="{9D6CC3B2-6B86-4605-AF63-16CB75CF6450}" type="datetimeFigureOut">
               <a:rPr lang="en-US" smtClean="0"/>
-              <a:t>8/20/2025</a:t>
+              <a:t>7/19/2026</a:t>
             </a:fld>
             <a:endParaRPr lang="en-US"/>
           </a:p>
@@ -8195,7 +8195,7 @@
           <a:p>
             <a:fld id="{9D6CC3B2-6B86-4605-AF63-16CB75CF6450}" type="datetimeFigureOut">
               <a:rPr lang="en-US" smtClean="0"/>
-              <a:t>8/20/2025</a:t>
+              <a:t>7/19/2026</a:t>
             </a:fld>
             <a:endParaRPr lang="en-US"/>
           </a:p>
@@ -8452,7 +8452,7 @@
           <a:p>
             <a:fld id="{9D6CC3B2-6B86-4605-AF63-16CB75CF6450}" type="datetimeFigureOut">
               <a:rPr lang="en-US" smtClean="0"/>
-              <a:t>8/20/2025</a:t>
+              <a:t>7/19/2026</a:t>
             </a:fld>
             <a:endParaRPr lang="en-US"/>
           </a:p>
@@ -8665,7 +8665,7 @@
           <a:p>
             <a:fld id="{9D6CC3B2-6B86-4605-AF63-16CB75CF6450}" type="datetimeFigureOut">
               <a:rPr lang="en-US" smtClean="0"/>
-              <a:t>8/20/2025</a:t>
+              <a:t>7/19/2026</a:t>
             </a:fld>
             <a:endParaRPr lang="en-US"/>
           </a:p>
@@ -20590,6 +20590,916 @@
           <a:chExt cx="0" cy="0"/>
         </a:xfrm>
       </p:grpSpPr>
+      <p:sp>
+        <p:nvSpPr>
+          <p:cNvPr id="37" name="矩形 36">
+            <a:extLst>
+              <a:ext uri="{FF2B5EF4-FFF2-40B4-BE49-F238E27FC236}">
+                <a16:creationId xmlns:a16="http://schemas.microsoft.com/office/drawing/2014/main" id="{B97EA6F8-46C1-EADD-7545-1F6BEC6D9B98}"/>
+              </a:ext>
+            </a:extLst>
+          </p:cNvPr>
+          <p:cNvSpPr/>
+          <p:nvPr/>
+        </p:nvSpPr>
+        <p:spPr>
+          <a:xfrm>
+            <a:off x="386080" y="132080"/>
+            <a:ext cx="5260678" cy="2775135"/>
+          </a:xfrm>
+          <a:prstGeom prst="rect">
+            <a:avLst/>
+          </a:prstGeom>
+          <a:solidFill>
+            <a:schemeClr val="bg1"/>
+          </a:solidFill>
+          <a:ln>
+            <a:noFill/>
+          </a:ln>
+        </p:spPr>
+        <p:style>
+          <a:lnRef idx="2">
+            <a:schemeClr val="accent1">
+              <a:shade val="15000"/>
+            </a:schemeClr>
+          </a:lnRef>
+          <a:fillRef idx="1">
+            <a:schemeClr val="accent1"/>
+          </a:fillRef>
+          <a:effectRef idx="0">
+            <a:schemeClr val="accent1"/>
+          </a:effectRef>
+          <a:fontRef idx="minor">
+            <a:schemeClr val="lt1"/>
+          </a:fontRef>
+        </p:style>
+        <p:txBody>
+          <a:bodyPr rtlCol="0" anchor="ctr"/>
+          <a:lstStyle/>
+          <a:p>
+            <a:pPr algn="ctr"/>
+            <a:endParaRPr lang="en-US"/>
+          </a:p>
+        </p:txBody>
+      </p:sp>
+      <p:sp>
+        <p:nvSpPr>
+          <p:cNvPr id="33" name="矩形 32">
+            <a:extLst>
+              <a:ext uri="{FF2B5EF4-FFF2-40B4-BE49-F238E27FC236}">
+                <a16:creationId xmlns:a16="http://schemas.microsoft.com/office/drawing/2014/main" id="{2B057908-7655-B3E5-6B8C-FF1418502EA6}"/>
+              </a:ext>
+            </a:extLst>
+          </p:cNvPr>
+          <p:cNvSpPr/>
+          <p:nvPr/>
+        </p:nvSpPr>
+        <p:spPr>
+          <a:xfrm>
+            <a:off x="4156727" y="583020"/>
+            <a:ext cx="1403413" cy="1873085"/>
+          </a:xfrm>
+          <a:prstGeom prst="rect">
+            <a:avLst/>
+          </a:prstGeom>
+          <a:solidFill>
+            <a:schemeClr val="accent2">
+              <a:alpha val="20000"/>
+            </a:schemeClr>
+          </a:solidFill>
+          <a:ln>
+            <a:noFill/>
+          </a:ln>
+        </p:spPr>
+        <p:style>
+          <a:lnRef idx="2">
+            <a:schemeClr val="accent1">
+              <a:shade val="15000"/>
+            </a:schemeClr>
+          </a:lnRef>
+          <a:fillRef idx="1">
+            <a:schemeClr val="accent1"/>
+          </a:fillRef>
+          <a:effectRef idx="0">
+            <a:schemeClr val="accent1"/>
+          </a:effectRef>
+          <a:fontRef idx="minor">
+            <a:schemeClr val="lt1"/>
+          </a:fontRef>
+        </p:style>
+        <p:txBody>
+          <a:bodyPr rtlCol="0" anchor="ctr"/>
+          <a:lstStyle/>
+          <a:p>
+            <a:pPr algn="ctr"/>
+            <a:endParaRPr lang="en-US"/>
+          </a:p>
+        </p:txBody>
+      </p:sp>
+      <p:sp>
+        <p:nvSpPr>
+          <p:cNvPr id="5" name="弧形 4">
+            <a:extLst>
+              <a:ext uri="{FF2B5EF4-FFF2-40B4-BE49-F238E27FC236}">
+                <a16:creationId xmlns:a16="http://schemas.microsoft.com/office/drawing/2014/main" id="{E362C73F-39BC-C9ED-E933-768071702003}"/>
+              </a:ext>
+            </a:extLst>
+          </p:cNvPr>
+          <p:cNvSpPr/>
+          <p:nvPr/>
+        </p:nvSpPr>
+        <p:spPr>
+          <a:xfrm rot="10800000">
+            <a:off x="509567" y="-708438"/>
+            <a:ext cx="4067025" cy="2949977"/>
+          </a:xfrm>
+          <a:prstGeom prst="arc">
+            <a:avLst>
+              <a:gd name="adj1" fmla="val 16200274"/>
+              <a:gd name="adj2" fmla="val 5815"/>
+            </a:avLst>
+          </a:prstGeom>
+          <a:ln w="19050">
+            <a:solidFill>
+              <a:schemeClr val="tx1"/>
+            </a:solidFill>
+          </a:ln>
+        </p:spPr>
+        <p:style>
+          <a:lnRef idx="2">
+            <a:schemeClr val="accent1"/>
+          </a:lnRef>
+          <a:fillRef idx="0">
+            <a:schemeClr val="accent1"/>
+          </a:fillRef>
+          <a:effectRef idx="1">
+            <a:schemeClr val="accent1"/>
+          </a:effectRef>
+          <a:fontRef idx="minor">
+            <a:schemeClr val="tx1"/>
+          </a:fontRef>
+        </p:style>
+        <p:txBody>
+          <a:bodyPr rtlCol="0" anchor="ctr"/>
+          <a:lstStyle/>
+          <a:p>
+            <a:pPr algn="ctr"/>
+            <a:endParaRPr lang="en-US"/>
+          </a:p>
+        </p:txBody>
+      </p:sp>
+      <p:sp>
+        <p:nvSpPr>
+          <p:cNvPr id="7" name="弧形 6">
+            <a:extLst>
+              <a:ext uri="{FF2B5EF4-FFF2-40B4-BE49-F238E27FC236}">
+                <a16:creationId xmlns:a16="http://schemas.microsoft.com/office/drawing/2014/main" id="{9CA69203-3211-02ED-0793-8605688F9F93}"/>
+              </a:ext>
+            </a:extLst>
+          </p:cNvPr>
+          <p:cNvSpPr/>
+          <p:nvPr/>
+        </p:nvSpPr>
+        <p:spPr>
+          <a:xfrm rot="5400000">
+            <a:off x="2538799" y="-746334"/>
+            <a:ext cx="1821023" cy="4145262"/>
+          </a:xfrm>
+          <a:prstGeom prst="arc">
+            <a:avLst>
+              <a:gd name="adj1" fmla="val 16198737"/>
+              <a:gd name="adj2" fmla="val 25596"/>
+            </a:avLst>
+          </a:prstGeom>
+          <a:ln w="19050">
+            <a:solidFill>
+              <a:schemeClr val="tx1"/>
+            </a:solidFill>
+          </a:ln>
+        </p:spPr>
+        <p:style>
+          <a:lnRef idx="2">
+            <a:schemeClr val="accent1"/>
+          </a:lnRef>
+          <a:fillRef idx="0">
+            <a:schemeClr val="accent1"/>
+          </a:fillRef>
+          <a:effectRef idx="1">
+            <a:schemeClr val="accent1"/>
+          </a:effectRef>
+          <a:fontRef idx="minor">
+            <a:schemeClr val="tx1"/>
+          </a:fontRef>
+        </p:style>
+        <p:txBody>
+          <a:bodyPr rtlCol="0" anchor="ctr"/>
+          <a:lstStyle/>
+          <a:p>
+            <a:pPr algn="ctr"/>
+            <a:endParaRPr lang="en-US"/>
+          </a:p>
+        </p:txBody>
+      </p:sp>
+      <p:sp>
+        <p:nvSpPr>
+          <p:cNvPr id="8" name="文本框 7">
+            <a:extLst>
+              <a:ext uri="{FF2B5EF4-FFF2-40B4-BE49-F238E27FC236}">
+                <a16:creationId xmlns:a16="http://schemas.microsoft.com/office/drawing/2014/main" id="{7E64B47F-7707-C42B-9E72-C2F665EEF087}"/>
+              </a:ext>
+            </a:extLst>
+          </p:cNvPr>
+          <p:cNvSpPr txBox="1"/>
+          <p:nvPr/>
+        </p:nvSpPr>
+        <p:spPr>
+          <a:xfrm>
+            <a:off x="476056" y="581884"/>
+            <a:ext cx="951160" cy="307777"/>
+          </a:xfrm>
+          <a:prstGeom prst="rect">
+            <a:avLst/>
+          </a:prstGeom>
+          <a:noFill/>
+        </p:spPr>
+        <p:txBody>
+          <a:bodyPr wrap="square" rtlCol="0">
+            <a:spAutoFit/>
+          </a:bodyPr>
+          <a:lstStyle/>
+          <a:p>
+            <a:r>
+              <a:rPr lang="en-US" altLang="zh-CN" sz="1400">
+                <a:latin typeface="Arial" panose="020B0604020202020204" pitchFamily="34" charset="0"/>
+                <a:cs typeface="Arial" panose="020B0604020202020204" pitchFamily="34" charset="0"/>
+              </a:rPr>
+              <a:t>20/80</a:t>
+            </a:r>
+            <a:endParaRPr lang="en-US" sz="1400">
+              <a:latin typeface="Arial" panose="020B0604020202020204" pitchFamily="34" charset="0"/>
+              <a:cs typeface="Arial" panose="020B0604020202020204" pitchFamily="34" charset="0"/>
+            </a:endParaRPr>
+          </a:p>
+        </p:txBody>
+      </p:sp>
+      <p:sp>
+        <p:nvSpPr>
+          <p:cNvPr id="10" name="文本框 9">
+            <a:extLst>
+              <a:ext uri="{FF2B5EF4-FFF2-40B4-BE49-F238E27FC236}">
+                <a16:creationId xmlns:a16="http://schemas.microsoft.com/office/drawing/2014/main" id="{C51D65EA-1DCB-EE88-388C-D807F560483D}"/>
+              </a:ext>
+            </a:extLst>
+          </p:cNvPr>
+          <p:cNvSpPr txBox="1"/>
+          <p:nvPr/>
+        </p:nvSpPr>
+        <p:spPr>
+          <a:xfrm>
+            <a:off x="2010320" y="1739798"/>
+            <a:ext cx="618191" cy="523220"/>
+          </a:xfrm>
+          <a:prstGeom prst="rect">
+            <a:avLst/>
+          </a:prstGeom>
+          <a:noFill/>
+        </p:spPr>
+        <p:txBody>
+          <a:bodyPr wrap="square" rtlCol="0">
+            <a:spAutoFit/>
+          </a:bodyPr>
+          <a:lstStyle/>
+          <a:p>
+            <a:r>
+              <a:rPr lang="zh-CN" altLang="en-US" sz="1400">
+                <a:latin typeface="华文楷体" panose="02010600040101010101" pitchFamily="2" charset="-122"/>
+                <a:ea typeface="华文楷体" panose="02010600040101010101" pitchFamily="2" charset="-122"/>
+                <a:cs typeface="Arial" panose="020B0604020202020204" pitchFamily="34" charset="0"/>
+              </a:rPr>
+              <a:t>长尾理论</a:t>
+            </a:r>
+            <a:endParaRPr lang="en-US" sz="1400">
+              <a:latin typeface="华文楷体" panose="02010600040101010101" pitchFamily="2" charset="-122"/>
+              <a:ea typeface="华文楷体" panose="02010600040101010101" pitchFamily="2" charset="-122"/>
+              <a:cs typeface="Arial" panose="020B0604020202020204" pitchFamily="34" charset="0"/>
+            </a:endParaRPr>
+          </a:p>
+        </p:txBody>
+      </p:sp>
+      <p:cxnSp>
+        <p:nvCxnSpPr>
+          <p:cNvPr id="12" name="直接连接符 11">
+            <a:extLst>
+              <a:ext uri="{FF2B5EF4-FFF2-40B4-BE49-F238E27FC236}">
+                <a16:creationId xmlns:a16="http://schemas.microsoft.com/office/drawing/2014/main" id="{5F299278-AE47-058B-4EDD-8F3342D5CA91}"/>
+              </a:ext>
+            </a:extLst>
+          </p:cNvPr>
+          <p:cNvCxnSpPr>
+            <a:cxnSpLocks/>
+          </p:cNvCxnSpPr>
+          <p:nvPr/>
+        </p:nvCxnSpPr>
+        <p:spPr>
+          <a:xfrm>
+            <a:off x="1966649" y="581884"/>
+            <a:ext cx="0" cy="1873085"/>
+          </a:xfrm>
+          <a:prstGeom prst="line">
+            <a:avLst/>
+          </a:prstGeom>
+          <a:ln>
+            <a:solidFill>
+              <a:schemeClr val="bg1">
+                <a:lumMod val="50000"/>
+              </a:schemeClr>
+            </a:solidFill>
+            <a:prstDash val="sysDot"/>
+          </a:ln>
+        </p:spPr>
+        <p:style>
+          <a:lnRef idx="2">
+            <a:schemeClr val="accent1"/>
+          </a:lnRef>
+          <a:fillRef idx="0">
+            <a:schemeClr val="accent1"/>
+          </a:fillRef>
+          <a:effectRef idx="1">
+            <a:schemeClr val="accent1"/>
+          </a:effectRef>
+          <a:fontRef idx="minor">
+            <a:schemeClr val="tx1"/>
+          </a:fontRef>
+        </p:style>
+      </p:cxnSp>
+      <p:sp>
+        <p:nvSpPr>
+          <p:cNvPr id="16" name="文本框 15">
+            <a:extLst>
+              <a:ext uri="{FF2B5EF4-FFF2-40B4-BE49-F238E27FC236}">
+                <a16:creationId xmlns:a16="http://schemas.microsoft.com/office/drawing/2014/main" id="{46FB7D04-8518-830C-7B29-A3DDCE2A632F}"/>
+              </a:ext>
+            </a:extLst>
+          </p:cNvPr>
+          <p:cNvSpPr txBox="1"/>
+          <p:nvPr/>
+        </p:nvSpPr>
+        <p:spPr>
+          <a:xfrm>
+            <a:off x="468457" y="250966"/>
+            <a:ext cx="2094235" cy="307777"/>
+          </a:xfrm>
+          <a:prstGeom prst="rect">
+            <a:avLst/>
+          </a:prstGeom>
+          <a:solidFill>
+            <a:schemeClr val="bg2"/>
+          </a:solidFill>
+          <a:ln w="3175">
+            <a:solidFill>
+              <a:schemeClr val="tx1"/>
+            </a:solidFill>
+          </a:ln>
+        </p:spPr>
+        <p:txBody>
+          <a:bodyPr wrap="square" rtlCol="0">
+            <a:spAutoFit/>
+          </a:bodyPr>
+          <a:lstStyle/>
+          <a:p>
+            <a:pPr algn="ctr"/>
+            <a:r>
+              <a:rPr lang="zh-CN" altLang="en-US" sz="1400">
+                <a:latin typeface="华文楷体" panose="02010600040101010101" pitchFamily="2" charset="-122"/>
+                <a:ea typeface="华文楷体" panose="02010600040101010101" pitchFamily="2" charset="-122"/>
+                <a:cs typeface="Arial" panose="020B0604020202020204" pitchFamily="34" charset="0"/>
+              </a:rPr>
+              <a:t>静态</a:t>
+            </a:r>
+            <a:r>
+              <a:rPr lang="en-US" altLang="zh-CN" sz="1400">
+                <a:latin typeface="华文楷体" panose="02010600040101010101" pitchFamily="2" charset="-122"/>
+                <a:ea typeface="华文楷体" panose="02010600040101010101" pitchFamily="2" charset="-122"/>
+                <a:cs typeface="Arial" panose="020B0604020202020204" pitchFamily="34" charset="0"/>
+              </a:rPr>
+              <a:t>/</a:t>
+            </a:r>
+            <a:r>
+              <a:rPr lang="zh-CN" altLang="en-US" sz="1400">
+                <a:latin typeface="华文楷体" panose="02010600040101010101" pitchFamily="2" charset="-122"/>
+                <a:ea typeface="华文楷体" panose="02010600040101010101" pitchFamily="2" charset="-122"/>
+                <a:cs typeface="Arial" panose="020B0604020202020204" pitchFamily="34" charset="0"/>
+              </a:rPr>
+              <a:t>当下</a:t>
+            </a:r>
+            <a:endParaRPr lang="en-US" sz="1400">
+              <a:latin typeface="华文楷体" panose="02010600040101010101" pitchFamily="2" charset="-122"/>
+              <a:ea typeface="华文楷体" panose="02010600040101010101" pitchFamily="2" charset="-122"/>
+              <a:cs typeface="Arial" panose="020B0604020202020204" pitchFamily="34" charset="0"/>
+            </a:endParaRPr>
+          </a:p>
+        </p:txBody>
+      </p:sp>
+      <p:sp>
+        <p:nvSpPr>
+          <p:cNvPr id="17" name="箭头: 右 16">
+            <a:extLst>
+              <a:ext uri="{FF2B5EF4-FFF2-40B4-BE49-F238E27FC236}">
+                <a16:creationId xmlns:a16="http://schemas.microsoft.com/office/drawing/2014/main" id="{3F87A3FC-24B5-2A33-0E66-1942F44D2059}"/>
+              </a:ext>
+            </a:extLst>
+          </p:cNvPr>
+          <p:cNvSpPr/>
+          <p:nvPr/>
+        </p:nvSpPr>
+        <p:spPr>
+          <a:xfrm>
+            <a:off x="2628511" y="1239521"/>
+            <a:ext cx="795490" cy="574234"/>
+          </a:xfrm>
+          <a:prstGeom prst="rightArrow">
+            <a:avLst/>
+          </a:prstGeom>
+          <a:solidFill>
+            <a:srgbClr val="FFC000"/>
+          </a:solidFill>
+          <a:ln w="6350"/>
+        </p:spPr>
+        <p:style>
+          <a:lnRef idx="2">
+            <a:schemeClr val="accent1">
+              <a:shade val="15000"/>
+            </a:schemeClr>
+          </a:lnRef>
+          <a:fillRef idx="1">
+            <a:schemeClr val="accent1"/>
+          </a:fillRef>
+          <a:effectRef idx="0">
+            <a:schemeClr val="accent1"/>
+          </a:effectRef>
+          <a:fontRef idx="minor">
+            <a:schemeClr val="lt1"/>
+          </a:fontRef>
+        </p:style>
+        <p:txBody>
+          <a:bodyPr rtlCol="0" anchor="ctr"/>
+          <a:lstStyle/>
+          <a:p>
+            <a:pPr algn="ctr"/>
+            <a:endParaRPr lang="en-US"/>
+          </a:p>
+        </p:txBody>
+      </p:sp>
+      <p:sp>
+        <p:nvSpPr>
+          <p:cNvPr id="19" name="文本框 18">
+            <a:extLst>
+              <a:ext uri="{FF2B5EF4-FFF2-40B4-BE49-F238E27FC236}">
+                <a16:creationId xmlns:a16="http://schemas.microsoft.com/office/drawing/2014/main" id="{FE4C2F9B-08AC-220E-0443-3B61C70BE187}"/>
+              </a:ext>
+            </a:extLst>
+          </p:cNvPr>
+          <p:cNvSpPr txBox="1"/>
+          <p:nvPr/>
+        </p:nvSpPr>
+        <p:spPr>
+          <a:xfrm>
+            <a:off x="2538488" y="1378787"/>
+            <a:ext cx="914400" cy="307777"/>
+          </a:xfrm>
+          <a:prstGeom prst="rect">
+            <a:avLst/>
+          </a:prstGeom>
+          <a:noFill/>
+        </p:spPr>
+        <p:txBody>
+          <a:bodyPr wrap="square" rtlCol="0">
+            <a:spAutoFit/>
+          </a:bodyPr>
+          <a:lstStyle/>
+          <a:p>
+            <a:r>
+              <a:rPr lang="zh-CN" altLang="en-US" sz="1400">
+                <a:latin typeface="华文楷体" panose="02010600040101010101" pitchFamily="2" charset="-122"/>
+                <a:ea typeface="华文楷体" panose="02010600040101010101" pitchFamily="2" charset="-122"/>
+                <a:cs typeface="Arial" panose="020B0604020202020204" pitchFamily="34" charset="0"/>
+              </a:rPr>
+              <a:t>二阶思维</a:t>
+            </a:r>
+            <a:endParaRPr lang="en-US" sz="1400">
+              <a:latin typeface="华文楷体" panose="02010600040101010101" pitchFamily="2" charset="-122"/>
+              <a:ea typeface="华文楷体" panose="02010600040101010101" pitchFamily="2" charset="-122"/>
+              <a:cs typeface="Arial" panose="020B0604020202020204" pitchFamily="34" charset="0"/>
+            </a:endParaRPr>
+          </a:p>
+        </p:txBody>
+      </p:sp>
+      <p:sp>
+        <p:nvSpPr>
+          <p:cNvPr id="23" name="文本框 22">
+            <a:extLst>
+              <a:ext uri="{FF2B5EF4-FFF2-40B4-BE49-F238E27FC236}">
+                <a16:creationId xmlns:a16="http://schemas.microsoft.com/office/drawing/2014/main" id="{B061EA84-3A48-C8C4-15C7-3CC0C91C615C}"/>
+              </a:ext>
+            </a:extLst>
+          </p:cNvPr>
+          <p:cNvSpPr txBox="1"/>
+          <p:nvPr/>
+        </p:nvSpPr>
+        <p:spPr>
+          <a:xfrm>
+            <a:off x="3449310" y="1739798"/>
+            <a:ext cx="725850" cy="523220"/>
+          </a:xfrm>
+          <a:prstGeom prst="rect">
+            <a:avLst/>
+          </a:prstGeom>
+          <a:noFill/>
+        </p:spPr>
+        <p:txBody>
+          <a:bodyPr wrap="square" rtlCol="0">
+            <a:spAutoFit/>
+          </a:bodyPr>
+          <a:lstStyle/>
+          <a:p>
+            <a:r>
+              <a:rPr lang="zh-CN" altLang="en-US" sz="1400">
+                <a:latin typeface="华文楷体" panose="02010600040101010101" pitchFamily="2" charset="-122"/>
+                <a:ea typeface="华文楷体" panose="02010600040101010101" pitchFamily="2" charset="-122"/>
+              </a:rPr>
+              <a:t>临界点思维</a:t>
+            </a:r>
+            <a:endParaRPr lang="en-US" sz="1400">
+              <a:latin typeface="华文楷体" panose="02010600040101010101" pitchFamily="2" charset="-122"/>
+              <a:ea typeface="华文楷体" panose="02010600040101010101" pitchFamily="2" charset="-122"/>
+            </a:endParaRPr>
+          </a:p>
+        </p:txBody>
+      </p:sp>
+      <p:sp>
+        <p:nvSpPr>
+          <p:cNvPr id="25" name="文本框 24">
+            <a:extLst>
+              <a:ext uri="{FF2B5EF4-FFF2-40B4-BE49-F238E27FC236}">
+                <a16:creationId xmlns:a16="http://schemas.microsoft.com/office/drawing/2014/main" id="{3321EF79-883A-FEB1-87D5-3BD1C87E9530}"/>
+              </a:ext>
+            </a:extLst>
+          </p:cNvPr>
+          <p:cNvSpPr txBox="1"/>
+          <p:nvPr/>
+        </p:nvSpPr>
+        <p:spPr>
+          <a:xfrm>
+            <a:off x="4529817" y="581884"/>
+            <a:ext cx="926927" cy="307777"/>
+          </a:xfrm>
+          <a:prstGeom prst="rect">
+            <a:avLst/>
+          </a:prstGeom>
+          <a:noFill/>
+        </p:spPr>
+        <p:txBody>
+          <a:bodyPr wrap="square" rtlCol="0">
+            <a:spAutoFit/>
+          </a:bodyPr>
+          <a:lstStyle/>
+          <a:p>
+            <a:r>
+              <a:rPr lang="zh-CN" altLang="en-US" sz="1400">
+                <a:latin typeface="华文楷体" panose="02010600040101010101" pitchFamily="2" charset="-122"/>
+                <a:ea typeface="华文楷体" panose="02010600040101010101" pitchFamily="2" charset="-122"/>
+                <a:cs typeface="Arial" panose="020B0604020202020204" pitchFamily="34" charset="0"/>
+              </a:rPr>
+              <a:t>复利效应</a:t>
+            </a:r>
+            <a:endParaRPr lang="en-US" sz="1400">
+              <a:latin typeface="华文楷体" panose="02010600040101010101" pitchFamily="2" charset="-122"/>
+              <a:ea typeface="华文楷体" panose="02010600040101010101" pitchFamily="2" charset="-122"/>
+              <a:cs typeface="Arial" panose="020B0604020202020204" pitchFamily="34" charset="0"/>
+            </a:endParaRPr>
+          </a:p>
+        </p:txBody>
+      </p:sp>
+      <p:sp>
+        <p:nvSpPr>
+          <p:cNvPr id="27" name="文本框 26">
+            <a:extLst>
+              <a:ext uri="{FF2B5EF4-FFF2-40B4-BE49-F238E27FC236}">
+                <a16:creationId xmlns:a16="http://schemas.microsoft.com/office/drawing/2014/main" id="{06A75556-CBD8-C9A2-8471-743D3A93B6B0}"/>
+              </a:ext>
+            </a:extLst>
+          </p:cNvPr>
+          <p:cNvSpPr txBox="1"/>
+          <p:nvPr/>
+        </p:nvSpPr>
+        <p:spPr>
+          <a:xfrm>
+            <a:off x="2334704" y="2599438"/>
+            <a:ext cx="1502704" cy="307777"/>
+          </a:xfrm>
+          <a:prstGeom prst="rect">
+            <a:avLst/>
+          </a:prstGeom>
+          <a:noFill/>
+        </p:spPr>
+        <p:txBody>
+          <a:bodyPr wrap="square" rtlCol="0">
+            <a:spAutoFit/>
+          </a:bodyPr>
+          <a:lstStyle/>
+          <a:p>
+            <a:r>
+              <a:rPr lang="zh-CN" altLang="en-US" sz="1400">
+                <a:latin typeface="华文楷体" panose="02010600040101010101" pitchFamily="2" charset="-122"/>
+                <a:ea typeface="华文楷体" panose="02010600040101010101" pitchFamily="2" charset="-122"/>
+                <a:cs typeface="Arial" panose="020B0604020202020204" pitchFamily="34" charset="0"/>
+              </a:rPr>
+              <a:t>非对称模型一览</a:t>
+            </a:r>
+            <a:endParaRPr lang="en-US" sz="1400">
+              <a:latin typeface="华文楷体" panose="02010600040101010101" pitchFamily="2" charset="-122"/>
+              <a:ea typeface="华文楷体" panose="02010600040101010101" pitchFamily="2" charset="-122"/>
+              <a:cs typeface="Arial" panose="020B0604020202020204" pitchFamily="34" charset="0"/>
+            </a:endParaRPr>
+          </a:p>
+        </p:txBody>
+      </p:sp>
+      <p:sp>
+        <p:nvSpPr>
+          <p:cNvPr id="28" name="矩形 27">
+            <a:extLst>
+              <a:ext uri="{FF2B5EF4-FFF2-40B4-BE49-F238E27FC236}">
+                <a16:creationId xmlns:a16="http://schemas.microsoft.com/office/drawing/2014/main" id="{72BD4A94-CFE4-CE7B-3348-2E1318381609}"/>
+              </a:ext>
+            </a:extLst>
+          </p:cNvPr>
+          <p:cNvSpPr/>
+          <p:nvPr/>
+        </p:nvSpPr>
+        <p:spPr>
+          <a:xfrm>
+            <a:off x="465897" y="583020"/>
+            <a:ext cx="1490592" cy="1873085"/>
+          </a:xfrm>
+          <a:prstGeom prst="rect">
+            <a:avLst/>
+          </a:prstGeom>
+          <a:solidFill>
+            <a:schemeClr val="accent2">
+              <a:alpha val="20000"/>
+            </a:schemeClr>
+          </a:solidFill>
+          <a:ln>
+            <a:noFill/>
+          </a:ln>
+        </p:spPr>
+        <p:style>
+          <a:lnRef idx="2">
+            <a:schemeClr val="accent1">
+              <a:shade val="15000"/>
+            </a:schemeClr>
+          </a:lnRef>
+          <a:fillRef idx="1">
+            <a:schemeClr val="accent1"/>
+          </a:fillRef>
+          <a:effectRef idx="0">
+            <a:schemeClr val="accent1"/>
+          </a:effectRef>
+          <a:fontRef idx="minor">
+            <a:schemeClr val="lt1"/>
+          </a:fontRef>
+        </p:style>
+        <p:txBody>
+          <a:bodyPr rtlCol="0" anchor="ctr"/>
+          <a:lstStyle/>
+          <a:p>
+            <a:pPr algn="ctr"/>
+            <a:endParaRPr lang="en-US"/>
+          </a:p>
+        </p:txBody>
+      </p:sp>
+      <p:sp>
+        <p:nvSpPr>
+          <p:cNvPr id="30" name="矩形 29">
+            <a:extLst>
+              <a:ext uri="{FF2B5EF4-FFF2-40B4-BE49-F238E27FC236}">
+                <a16:creationId xmlns:a16="http://schemas.microsoft.com/office/drawing/2014/main" id="{544885AD-C544-9B7D-BEA5-F6E89CDA18B4}"/>
+              </a:ext>
+            </a:extLst>
+          </p:cNvPr>
+          <p:cNvSpPr/>
+          <p:nvPr/>
+        </p:nvSpPr>
+        <p:spPr>
+          <a:xfrm>
+            <a:off x="1972119" y="581884"/>
+            <a:ext cx="590573" cy="1873085"/>
+          </a:xfrm>
+          <a:prstGeom prst="rect">
+            <a:avLst/>
+          </a:prstGeom>
+          <a:solidFill>
+            <a:srgbClr val="0070C0">
+              <a:alpha val="20000"/>
+            </a:srgbClr>
+          </a:solidFill>
+          <a:ln>
+            <a:noFill/>
+          </a:ln>
+        </p:spPr>
+        <p:style>
+          <a:lnRef idx="2">
+            <a:schemeClr val="accent1">
+              <a:shade val="15000"/>
+            </a:schemeClr>
+          </a:lnRef>
+          <a:fillRef idx="1">
+            <a:schemeClr val="accent1"/>
+          </a:fillRef>
+          <a:effectRef idx="0">
+            <a:schemeClr val="accent1"/>
+          </a:effectRef>
+          <a:fontRef idx="minor">
+            <a:schemeClr val="lt1"/>
+          </a:fontRef>
+        </p:style>
+        <p:txBody>
+          <a:bodyPr rtlCol="0" anchor="ctr"/>
+          <a:lstStyle/>
+          <a:p>
+            <a:pPr algn="ctr"/>
+            <a:endParaRPr lang="en-US"/>
+          </a:p>
+        </p:txBody>
+      </p:sp>
+      <p:cxnSp>
+        <p:nvCxnSpPr>
+          <p:cNvPr id="32" name="直接连接符 31">
+            <a:extLst>
+              <a:ext uri="{FF2B5EF4-FFF2-40B4-BE49-F238E27FC236}">
+                <a16:creationId xmlns:a16="http://schemas.microsoft.com/office/drawing/2014/main" id="{CFED3C70-630E-4621-F233-A5FA0C2A2A25}"/>
+              </a:ext>
+            </a:extLst>
+          </p:cNvPr>
+          <p:cNvCxnSpPr>
+            <a:cxnSpLocks/>
+          </p:cNvCxnSpPr>
+          <p:nvPr/>
+        </p:nvCxnSpPr>
+        <p:spPr>
+          <a:xfrm>
+            <a:off x="4151257" y="600889"/>
+            <a:ext cx="0" cy="1873085"/>
+          </a:xfrm>
+          <a:prstGeom prst="line">
+            <a:avLst/>
+          </a:prstGeom>
+          <a:ln>
+            <a:solidFill>
+              <a:schemeClr val="bg1">
+                <a:lumMod val="50000"/>
+              </a:schemeClr>
+            </a:solidFill>
+            <a:prstDash val="sysDot"/>
+          </a:ln>
+        </p:spPr>
+        <p:style>
+          <a:lnRef idx="2">
+            <a:schemeClr val="accent1"/>
+          </a:lnRef>
+          <a:fillRef idx="0">
+            <a:schemeClr val="accent1"/>
+          </a:fillRef>
+          <a:effectRef idx="1">
+            <a:schemeClr val="accent1"/>
+          </a:effectRef>
+          <a:fontRef idx="minor">
+            <a:schemeClr val="tx1"/>
+          </a:fontRef>
+        </p:style>
+      </p:cxnSp>
+      <p:sp>
+        <p:nvSpPr>
+          <p:cNvPr id="34" name="矩形 33">
+            <a:extLst>
+              <a:ext uri="{FF2B5EF4-FFF2-40B4-BE49-F238E27FC236}">
+                <a16:creationId xmlns:a16="http://schemas.microsoft.com/office/drawing/2014/main" id="{4EA07926-1DB8-C27D-0180-27E010E7A976}"/>
+              </a:ext>
+            </a:extLst>
+          </p:cNvPr>
+          <p:cNvSpPr/>
+          <p:nvPr/>
+        </p:nvSpPr>
+        <p:spPr>
+          <a:xfrm>
+            <a:off x="3430953" y="581884"/>
+            <a:ext cx="718823" cy="1873085"/>
+          </a:xfrm>
+          <a:prstGeom prst="rect">
+            <a:avLst/>
+          </a:prstGeom>
+          <a:solidFill>
+            <a:srgbClr val="0070C0">
+              <a:alpha val="20000"/>
+            </a:srgbClr>
+          </a:solidFill>
+          <a:ln>
+            <a:noFill/>
+          </a:ln>
+        </p:spPr>
+        <p:style>
+          <a:lnRef idx="2">
+            <a:schemeClr val="accent1">
+              <a:shade val="15000"/>
+            </a:schemeClr>
+          </a:lnRef>
+          <a:fillRef idx="1">
+            <a:schemeClr val="accent1"/>
+          </a:fillRef>
+          <a:effectRef idx="0">
+            <a:schemeClr val="accent1"/>
+          </a:effectRef>
+          <a:fontRef idx="minor">
+            <a:schemeClr val="lt1"/>
+          </a:fontRef>
+        </p:style>
+        <p:txBody>
+          <a:bodyPr rtlCol="0" anchor="ctr"/>
+          <a:lstStyle/>
+          <a:p>
+            <a:pPr algn="ctr"/>
+            <a:endParaRPr lang="en-US"/>
+          </a:p>
+        </p:txBody>
+      </p:sp>
+      <p:sp>
+        <p:nvSpPr>
+          <p:cNvPr id="36" name="文本框 35">
+            <a:extLst>
+              <a:ext uri="{FF2B5EF4-FFF2-40B4-BE49-F238E27FC236}">
+                <a16:creationId xmlns:a16="http://schemas.microsoft.com/office/drawing/2014/main" id="{B705DC4D-31DE-E2FB-4F5C-32632D60F25F}"/>
+              </a:ext>
+            </a:extLst>
+          </p:cNvPr>
+          <p:cNvSpPr txBox="1"/>
+          <p:nvPr/>
+        </p:nvSpPr>
+        <p:spPr>
+          <a:xfrm>
+            <a:off x="3424001" y="250966"/>
+            <a:ext cx="2136135" cy="307777"/>
+          </a:xfrm>
+          <a:prstGeom prst="rect">
+            <a:avLst/>
+          </a:prstGeom>
+          <a:solidFill>
+            <a:schemeClr val="bg2"/>
+          </a:solidFill>
+          <a:ln w="3175">
+            <a:solidFill>
+              <a:schemeClr val="tx1"/>
+            </a:solidFill>
+          </a:ln>
+        </p:spPr>
+        <p:txBody>
+          <a:bodyPr wrap="square" rtlCol="0">
+            <a:spAutoFit/>
+          </a:bodyPr>
+          <a:lstStyle/>
+          <a:p>
+            <a:pPr algn="ctr"/>
+            <a:r>
+              <a:rPr lang="zh-CN" altLang="en-US" sz="1400">
+                <a:latin typeface="华文楷体" panose="02010600040101010101" pitchFamily="2" charset="-122"/>
+                <a:ea typeface="华文楷体" panose="02010600040101010101" pitchFamily="2" charset="-122"/>
+                <a:cs typeface="Arial" panose="020B0604020202020204" pitchFamily="34" charset="0"/>
+              </a:rPr>
+              <a:t>动态</a:t>
+            </a:r>
+            <a:r>
+              <a:rPr lang="en-US" altLang="zh-CN" sz="1400">
+                <a:latin typeface="华文楷体" panose="02010600040101010101" pitchFamily="2" charset="-122"/>
+                <a:ea typeface="华文楷体" panose="02010600040101010101" pitchFamily="2" charset="-122"/>
+                <a:cs typeface="Arial" panose="020B0604020202020204" pitchFamily="34" charset="0"/>
+              </a:rPr>
+              <a:t>/</a:t>
+            </a:r>
+            <a:r>
+              <a:rPr lang="zh-CN" altLang="en-US" sz="1400">
+                <a:latin typeface="华文楷体" panose="02010600040101010101" pitchFamily="2" charset="-122"/>
+                <a:ea typeface="华文楷体" panose="02010600040101010101" pitchFamily="2" charset="-122"/>
+                <a:cs typeface="Arial" panose="020B0604020202020204" pitchFamily="34" charset="0"/>
+              </a:rPr>
+              <a:t>未来</a:t>
+            </a:r>
+            <a:endParaRPr lang="en-US" sz="1400">
+              <a:latin typeface="华文楷体" panose="02010600040101010101" pitchFamily="2" charset="-122"/>
+              <a:ea typeface="华文楷体" panose="02010600040101010101" pitchFamily="2" charset="-122"/>
+              <a:cs typeface="Arial" panose="020B0604020202020204" pitchFamily="34" charset="0"/>
+            </a:endParaRPr>
+          </a:p>
+        </p:txBody>
+      </p:sp>
     </p:spTree>
     <p:extLst>
       <p:ext uri="{BB962C8B-B14F-4D97-AF65-F5344CB8AC3E}">
@@ -20626,6 +21536,366 @@
           <a:chExt cx="0" cy="0"/>
         </a:xfrm>
       </p:grpSpPr>
+      <p:cxnSp>
+        <p:nvCxnSpPr>
+          <p:cNvPr id="4" name="直接连接符 3">
+            <a:extLst>
+              <a:ext uri="{FF2B5EF4-FFF2-40B4-BE49-F238E27FC236}">
+                <a16:creationId xmlns:a16="http://schemas.microsoft.com/office/drawing/2014/main" id="{F0C60D47-DFD2-0777-6C1D-3C557EF093B4}"/>
+              </a:ext>
+            </a:extLst>
+          </p:cNvPr>
+          <p:cNvCxnSpPr>
+            <a:cxnSpLocks/>
+          </p:cNvCxnSpPr>
+          <p:nvPr/>
+        </p:nvCxnSpPr>
+        <p:spPr>
+          <a:xfrm>
+            <a:off x="3083185" y="285424"/>
+            <a:ext cx="0" cy="2875919"/>
+          </a:xfrm>
+          <a:prstGeom prst="line">
+            <a:avLst/>
+          </a:prstGeom>
+          <a:ln>
+            <a:solidFill>
+              <a:schemeClr val="bg1">
+                <a:lumMod val="50000"/>
+              </a:schemeClr>
+            </a:solidFill>
+            <a:prstDash val="solid"/>
+            <a:headEnd type="arrow"/>
+            <a:tailEnd type="none"/>
+          </a:ln>
+        </p:spPr>
+        <p:style>
+          <a:lnRef idx="2">
+            <a:schemeClr val="accent1"/>
+          </a:lnRef>
+          <a:fillRef idx="0">
+            <a:schemeClr val="accent1"/>
+          </a:fillRef>
+          <a:effectRef idx="1">
+            <a:schemeClr val="accent1"/>
+          </a:effectRef>
+          <a:fontRef idx="minor">
+            <a:schemeClr val="tx1"/>
+          </a:fontRef>
+        </p:style>
+      </p:cxnSp>
+      <p:cxnSp>
+        <p:nvCxnSpPr>
+          <p:cNvPr id="7" name="直接连接符 6">
+            <a:extLst>
+              <a:ext uri="{FF2B5EF4-FFF2-40B4-BE49-F238E27FC236}">
+                <a16:creationId xmlns:a16="http://schemas.microsoft.com/office/drawing/2014/main" id="{F11F5897-859E-92AF-BF4C-BB8A438E3449}"/>
+              </a:ext>
+            </a:extLst>
+          </p:cNvPr>
+          <p:cNvCxnSpPr>
+            <a:cxnSpLocks/>
+          </p:cNvCxnSpPr>
+          <p:nvPr/>
+        </p:nvCxnSpPr>
+        <p:spPr>
+          <a:xfrm flipH="1">
+            <a:off x="905542" y="1709737"/>
+            <a:ext cx="4314349" cy="1"/>
+          </a:xfrm>
+          <a:prstGeom prst="line">
+            <a:avLst/>
+          </a:prstGeom>
+          <a:ln>
+            <a:solidFill>
+              <a:schemeClr val="bg1">
+                <a:lumMod val="50000"/>
+              </a:schemeClr>
+            </a:solidFill>
+            <a:prstDash val="solid"/>
+            <a:headEnd type="arrow"/>
+            <a:tailEnd type="none"/>
+          </a:ln>
+        </p:spPr>
+        <p:style>
+          <a:lnRef idx="2">
+            <a:schemeClr val="accent1"/>
+          </a:lnRef>
+          <a:fillRef idx="0">
+            <a:schemeClr val="accent1"/>
+          </a:fillRef>
+          <a:effectRef idx="1">
+            <a:schemeClr val="accent1"/>
+          </a:effectRef>
+          <a:fontRef idx="minor">
+            <a:schemeClr val="tx1"/>
+          </a:fontRef>
+        </p:style>
+      </p:cxnSp>
+      <p:sp>
+        <p:nvSpPr>
+          <p:cNvPr id="14" name="文本框 13">
+            <a:extLst>
+              <a:ext uri="{FF2B5EF4-FFF2-40B4-BE49-F238E27FC236}">
+                <a16:creationId xmlns:a16="http://schemas.microsoft.com/office/drawing/2014/main" id="{20FA4434-D320-B40F-8EF0-2EB883766684}"/>
+              </a:ext>
+            </a:extLst>
+          </p:cNvPr>
+          <p:cNvSpPr txBox="1"/>
+          <p:nvPr/>
+        </p:nvSpPr>
+        <p:spPr>
+          <a:xfrm>
+            <a:off x="4755799" y="1783523"/>
+            <a:ext cx="1236047" cy="369332"/>
+          </a:xfrm>
+          <a:prstGeom prst="rect">
+            <a:avLst/>
+          </a:prstGeom>
+          <a:noFill/>
+        </p:spPr>
+        <p:txBody>
+          <a:bodyPr wrap="square" rtlCol="0">
+            <a:spAutoFit/>
+          </a:bodyPr>
+          <a:lstStyle/>
+          <a:p>
+            <a:r>
+              <a:rPr lang="zh-CN" altLang="en-US" sz="900">
+                <a:latin typeface="华文楷体" panose="02010600040101010101" pitchFamily="2" charset="-122"/>
+                <a:ea typeface="华文楷体" panose="02010600040101010101" pitchFamily="2" charset="-122"/>
+                <a:cs typeface="Arial" panose="020B0604020202020204" pitchFamily="34" charset="0"/>
+              </a:rPr>
+              <a:t>预测误差：模型与外部输入的概率差距</a:t>
+            </a:r>
+            <a:endParaRPr lang="en-US" sz="900">
+              <a:latin typeface="华文楷体" panose="02010600040101010101" pitchFamily="2" charset="-122"/>
+              <a:ea typeface="华文楷体" panose="02010600040101010101" pitchFamily="2" charset="-122"/>
+              <a:cs typeface="Arial" panose="020B0604020202020204" pitchFamily="34" charset="0"/>
+            </a:endParaRPr>
+          </a:p>
+        </p:txBody>
+      </p:sp>
+      <p:sp>
+        <p:nvSpPr>
+          <p:cNvPr id="16" name="文本框 15">
+            <a:extLst>
+              <a:ext uri="{FF2B5EF4-FFF2-40B4-BE49-F238E27FC236}">
+                <a16:creationId xmlns:a16="http://schemas.microsoft.com/office/drawing/2014/main" id="{4374E214-980B-4A5B-BE46-DA156C73B6F8}"/>
+              </a:ext>
+            </a:extLst>
+          </p:cNvPr>
+          <p:cNvSpPr txBox="1"/>
+          <p:nvPr/>
+        </p:nvSpPr>
+        <p:spPr>
+          <a:xfrm>
+            <a:off x="1176770" y="698971"/>
+            <a:ext cx="918539" cy="738664"/>
+          </a:xfrm>
+          <a:prstGeom prst="rect">
+            <a:avLst/>
+          </a:prstGeom>
+          <a:noFill/>
+        </p:spPr>
+        <p:txBody>
+          <a:bodyPr wrap="square" rtlCol="0">
+            <a:spAutoFit/>
+          </a:bodyPr>
+          <a:lstStyle/>
+          <a:p>
+            <a:r>
+              <a:rPr lang="zh-CN" altLang="en-US" sz="1400">
+                <a:latin typeface="华文楷体" panose="02010600040101010101" pitchFamily="2" charset="-122"/>
+                <a:ea typeface="华文楷体" panose="02010600040101010101" pitchFamily="2" charset="-122"/>
+                <a:cs typeface="Arial" panose="020B0604020202020204" pitchFamily="34" charset="0"/>
+              </a:rPr>
+              <a:t>模型和外部输入都可信</a:t>
+            </a:r>
+            <a:endParaRPr lang="en-US" sz="1400">
+              <a:latin typeface="华文楷体" panose="02010600040101010101" pitchFamily="2" charset="-122"/>
+              <a:ea typeface="华文楷体" panose="02010600040101010101" pitchFamily="2" charset="-122"/>
+              <a:cs typeface="Arial" panose="020B0604020202020204" pitchFamily="34" charset="0"/>
+            </a:endParaRPr>
+          </a:p>
+        </p:txBody>
+      </p:sp>
+      <p:sp>
+        <p:nvSpPr>
+          <p:cNvPr id="20" name="文本框 19">
+            <a:extLst>
+              <a:ext uri="{FF2B5EF4-FFF2-40B4-BE49-F238E27FC236}">
+                <a16:creationId xmlns:a16="http://schemas.microsoft.com/office/drawing/2014/main" id="{772A9340-1F48-DC76-DF95-3C6F2B9DB2DB}"/>
+              </a:ext>
+            </a:extLst>
+          </p:cNvPr>
+          <p:cNvSpPr txBox="1"/>
+          <p:nvPr/>
+        </p:nvSpPr>
+        <p:spPr>
+          <a:xfrm>
+            <a:off x="3073140" y="258132"/>
+            <a:ext cx="713119" cy="646331"/>
+          </a:xfrm>
+          <a:prstGeom prst="rect">
+            <a:avLst/>
+          </a:prstGeom>
+          <a:noFill/>
+        </p:spPr>
+        <p:txBody>
+          <a:bodyPr wrap="square" rtlCol="0">
+            <a:spAutoFit/>
+          </a:bodyPr>
+          <a:lstStyle/>
+          <a:p>
+            <a:r>
+              <a:rPr lang="zh-CN" altLang="en-US" sz="900">
+                <a:latin typeface="华文楷体" panose="02010600040101010101" pitchFamily="2" charset="-122"/>
+                <a:ea typeface="华文楷体" panose="02010600040101010101" pitchFamily="2" charset="-122"/>
+                <a:cs typeface="Arial" panose="020B0604020202020204" pitchFamily="34" charset="0"/>
+              </a:rPr>
+              <a:t>精度：模型与外部输入的概率可信度</a:t>
+            </a:r>
+            <a:endParaRPr lang="en-US" sz="900">
+              <a:latin typeface="华文楷体" panose="02010600040101010101" pitchFamily="2" charset="-122"/>
+              <a:ea typeface="华文楷体" panose="02010600040101010101" pitchFamily="2" charset="-122"/>
+              <a:cs typeface="Arial" panose="020B0604020202020204" pitchFamily="34" charset="0"/>
+            </a:endParaRPr>
+          </a:p>
+        </p:txBody>
+      </p:sp>
+      <p:sp>
+        <p:nvSpPr>
+          <p:cNvPr id="22" name="文本框 21">
+            <a:extLst>
+              <a:ext uri="{FF2B5EF4-FFF2-40B4-BE49-F238E27FC236}">
+                <a16:creationId xmlns:a16="http://schemas.microsoft.com/office/drawing/2014/main" id="{4B93A423-3189-1B7D-AC6B-5D8155207C52}"/>
+              </a:ext>
+            </a:extLst>
+          </p:cNvPr>
+          <p:cNvSpPr txBox="1"/>
+          <p:nvPr/>
+        </p:nvSpPr>
+        <p:spPr>
+          <a:xfrm>
+            <a:off x="1176770" y="1968189"/>
+            <a:ext cx="918539" cy="738664"/>
+          </a:xfrm>
+          <a:prstGeom prst="rect">
+            <a:avLst/>
+          </a:prstGeom>
+          <a:noFill/>
+        </p:spPr>
+        <p:txBody>
+          <a:bodyPr wrap="square" rtlCol="0">
+            <a:spAutoFit/>
+          </a:bodyPr>
+          <a:lstStyle/>
+          <a:p>
+            <a:r>
+              <a:rPr lang="zh-CN" altLang="en-US" sz="1400">
+                <a:latin typeface="华文楷体" panose="02010600040101010101" pitchFamily="2" charset="-122"/>
+                <a:ea typeface="华文楷体" panose="02010600040101010101" pitchFamily="2" charset="-122"/>
+                <a:cs typeface="Arial" panose="020B0604020202020204" pitchFamily="34" charset="0"/>
+              </a:rPr>
+              <a:t>模型和外部输入都不可信</a:t>
+            </a:r>
+            <a:endParaRPr lang="en-US" sz="1400">
+              <a:latin typeface="华文楷体" panose="02010600040101010101" pitchFamily="2" charset="-122"/>
+              <a:ea typeface="华文楷体" panose="02010600040101010101" pitchFamily="2" charset="-122"/>
+              <a:cs typeface="Arial" panose="020B0604020202020204" pitchFamily="34" charset="0"/>
+            </a:endParaRPr>
+          </a:p>
+        </p:txBody>
+      </p:sp>
+      <p:sp>
+        <p:nvSpPr>
+          <p:cNvPr id="24" name="文本框 23">
+            <a:extLst>
+              <a:ext uri="{FF2B5EF4-FFF2-40B4-BE49-F238E27FC236}">
+                <a16:creationId xmlns:a16="http://schemas.microsoft.com/office/drawing/2014/main" id="{02BDEB32-9586-492E-DE8A-BEC2145B74DF}"/>
+              </a:ext>
+            </a:extLst>
+          </p:cNvPr>
+          <p:cNvSpPr txBox="1"/>
+          <p:nvPr/>
+        </p:nvSpPr>
+        <p:spPr>
+          <a:xfrm>
+            <a:off x="3845551" y="1981840"/>
+            <a:ext cx="918539" cy="738664"/>
+          </a:xfrm>
+          <a:prstGeom prst="rect">
+            <a:avLst/>
+          </a:prstGeom>
+          <a:noFill/>
+        </p:spPr>
+        <p:txBody>
+          <a:bodyPr wrap="square" rtlCol="0">
+            <a:spAutoFit/>
+          </a:bodyPr>
+          <a:lstStyle/>
+          <a:p>
+            <a:r>
+              <a:rPr lang="zh-CN" altLang="en-US" sz="1400">
+                <a:latin typeface="华文楷体" panose="02010600040101010101" pitchFamily="2" charset="-122"/>
+                <a:ea typeface="华文楷体" panose="02010600040101010101" pitchFamily="2" charset="-122"/>
+                <a:cs typeface="Arial" panose="020B0604020202020204" pitchFamily="34" charset="0"/>
+              </a:rPr>
+              <a:t>模型比外部输入更可信</a:t>
+            </a:r>
+            <a:endParaRPr lang="en-US" sz="1400">
+              <a:latin typeface="华文楷体" panose="02010600040101010101" pitchFamily="2" charset="-122"/>
+              <a:ea typeface="华文楷体" panose="02010600040101010101" pitchFamily="2" charset="-122"/>
+              <a:cs typeface="Arial" panose="020B0604020202020204" pitchFamily="34" charset="0"/>
+            </a:endParaRPr>
+          </a:p>
+        </p:txBody>
+      </p:sp>
+      <p:sp>
+        <p:nvSpPr>
+          <p:cNvPr id="26" name="文本框 25">
+            <a:extLst>
+              <a:ext uri="{FF2B5EF4-FFF2-40B4-BE49-F238E27FC236}">
+                <a16:creationId xmlns:a16="http://schemas.microsoft.com/office/drawing/2014/main" id="{7E3C8AAB-3370-BBE7-DF48-E2CEF2B7CEFF}"/>
+              </a:ext>
+            </a:extLst>
+          </p:cNvPr>
+          <p:cNvSpPr txBox="1"/>
+          <p:nvPr/>
+        </p:nvSpPr>
+        <p:spPr>
+          <a:xfrm>
+            <a:off x="3845551" y="638635"/>
+            <a:ext cx="918539" cy="738664"/>
+          </a:xfrm>
+          <a:prstGeom prst="rect">
+            <a:avLst/>
+          </a:prstGeom>
+          <a:noFill/>
+        </p:spPr>
+        <p:txBody>
+          <a:bodyPr wrap="square" rtlCol="0">
+            <a:spAutoFit/>
+          </a:bodyPr>
+          <a:lstStyle/>
+          <a:p>
+            <a:r>
+              <a:rPr lang="zh-CN" altLang="en-US" sz="1400">
+                <a:latin typeface="华文楷体" panose="02010600040101010101" pitchFamily="2" charset="-122"/>
+                <a:ea typeface="华文楷体" panose="02010600040101010101" pitchFamily="2" charset="-122"/>
+                <a:cs typeface="Arial" panose="020B0604020202020204" pitchFamily="34" charset="0"/>
+              </a:rPr>
+              <a:t>外部输入比模型更可信</a:t>
+            </a:r>
+            <a:endParaRPr lang="en-US" sz="1400">
+              <a:latin typeface="华文楷体" panose="02010600040101010101" pitchFamily="2" charset="-122"/>
+              <a:ea typeface="华文楷体" panose="02010600040101010101" pitchFamily="2" charset="-122"/>
+              <a:cs typeface="Arial" panose="020B0604020202020204" pitchFamily="34" charset="0"/>
+            </a:endParaRPr>
+          </a:p>
+        </p:txBody>
+      </p:sp>
     </p:spTree>
     <p:extLst>
       <p:ext uri="{BB962C8B-B14F-4D97-AF65-F5344CB8AC3E}">
@@ -20662,6 +21932,293 @@
           <a:chExt cx="0" cy="0"/>
         </a:xfrm>
       </p:grpSpPr>
+      <p:sp>
+        <p:nvSpPr>
+          <p:cNvPr id="3" name="文本框 2">
+            <a:extLst>
+              <a:ext uri="{FF2B5EF4-FFF2-40B4-BE49-F238E27FC236}">
+                <a16:creationId xmlns:a16="http://schemas.microsoft.com/office/drawing/2014/main" id="{70588087-2EDB-3C23-961D-6DCA7DB28CDA}"/>
+              </a:ext>
+            </a:extLst>
+          </p:cNvPr>
+          <p:cNvSpPr txBox="1"/>
+          <p:nvPr/>
+        </p:nvSpPr>
+        <p:spPr>
+          <a:xfrm>
+            <a:off x="0" y="-1997101"/>
+            <a:ext cx="6156325" cy="5586145"/>
+          </a:xfrm>
+          <a:prstGeom prst="rect">
+            <a:avLst/>
+          </a:prstGeom>
+          <a:noFill/>
+        </p:spPr>
+        <p:txBody>
+          <a:bodyPr wrap="square">
+            <a:spAutoFit/>
+          </a:bodyPr>
+          <a:lstStyle/>
+          <a:p>
+            <a:r>
+              <a:rPr lang="en-US" sz="700"/>
+              <a:t>### 核心引擎：非对称性生命周期（5个问题）</a:t>
+            </a:r>
+          </a:p>
+          <a:p>
+            <a:endParaRPr lang="en-US" sz="700"/>
+          </a:p>
+          <a:p>
+            <a:r>
+              <a:rPr lang="en-US" sz="700"/>
+              <a:t>这部分问题，用于识别你的直觉正在呼应非对称性的哪个阶段，以及它看到了什么价值。</a:t>
+            </a:r>
+          </a:p>
+          <a:p>
+            <a:endParaRPr lang="en-US" sz="700"/>
+          </a:p>
+          <a:p>
+            <a:r>
+              <a:rPr lang="en-US" sz="700"/>
+              <a:t>**1. 二八法则（识别关键少数）**</a:t>
+            </a:r>
+          </a:p>
+          <a:p>
+            <a:r>
+              <a:rPr lang="en-US" sz="700"/>
+              <a:t>这个问题在问：**你的直觉是否在告诉你，某个东西的重要性被严重低估了？**</a:t>
+            </a:r>
+          </a:p>
+          <a:p>
+            <a:r>
+              <a:rPr lang="en-US" sz="700"/>
+              <a:t>- 问题：**“此刻，是不是有一件事，虽然不大，但如果做了它，其他很多事都会变得容易或无关紧要？”**</a:t>
+            </a:r>
+          </a:p>
+          <a:p>
+            <a:r>
+              <a:rPr lang="en-US" sz="700"/>
+              <a:t>- 说明：这个问题帮你捕捉那种“牵一发而动全身”的杠杆感。它不问你“什么最重要”，而是问你“什么能让别的事变得不重要”。</a:t>
+            </a:r>
+          </a:p>
+          <a:p>
+            <a:endParaRPr lang="en-US" sz="700"/>
+          </a:p>
+          <a:p>
+            <a:r>
+              <a:rPr lang="en-US" sz="700"/>
+              <a:t>**2. 长尾理论（保留期权价值）**</a:t>
+            </a:r>
+          </a:p>
+          <a:p>
+            <a:r>
+              <a:rPr lang="en-US" sz="700"/>
+              <a:t>这个问题在问：**你的直觉是否在告诉你，某个东西的价值不在于现在用，而在于未来可能的“万一”？**</a:t>
+            </a:r>
+          </a:p>
+          <a:p>
+            <a:r>
+              <a:rPr lang="en-US" sz="700"/>
+              <a:t>- 问题：**“是不是有个选项，现在看似无用，但丢掉它我会隐隐不安，因为它可能在某种我无法预测的情境下变得至关重要？”**</a:t>
+            </a:r>
+          </a:p>
+          <a:p>
+            <a:r>
+              <a:rPr lang="en-US" sz="700"/>
+              <a:t>- 说明：这个问题帮你识别那种“低成本的保险”或“未来的种子”的感觉。它把焦点从“现在的效用”转移到“未来的可能性”。</a:t>
+            </a:r>
+          </a:p>
+          <a:p>
+            <a:endParaRPr lang="en-US" sz="700"/>
+          </a:p>
+          <a:p>
+            <a:r>
+              <a:rPr lang="en-US" sz="700"/>
+              <a:t>**3. 临界点思维（识别质变前夕）**</a:t>
+            </a:r>
+          </a:p>
+          <a:p>
+            <a:r>
+              <a:rPr lang="en-US" sz="700"/>
+              <a:t>这个问题在问：**你的直觉是否在告诉你，现在的投入产出比很低，不是因为错了，而是因为量还没到？**</a:t>
+            </a:r>
+          </a:p>
+          <a:p>
+            <a:r>
+              <a:rPr lang="en-US" sz="700"/>
+              <a:t>- 问题：**“我是不是已经在这条路上走了一段时间，但还没看到明显回报？我的直觉是告诉我要放弃，还是告诉我‘快了’？”**</a:t>
+            </a:r>
+          </a:p>
+          <a:p>
+            <a:r>
+              <a:rPr lang="en-US" sz="700"/>
+              <a:t>- 说明：这个问题帮你区分“死路”和“黎明前的黑暗”。它逼你审视直觉是疲惫的产物，还是对拐点的预感。</a:t>
+            </a:r>
+          </a:p>
+          <a:p>
+            <a:endParaRPr lang="en-US" sz="700"/>
+          </a:p>
+          <a:p>
+            <a:r>
+              <a:rPr lang="en-US" sz="700"/>
+              <a:t>**4. 复利效应（看见长期积累）**</a:t>
+            </a:r>
+          </a:p>
+          <a:p>
+            <a:r>
+              <a:rPr lang="en-US" sz="700"/>
+              <a:t>这个问题在问：**你的直觉是否在告诉你，这件事的价值不在于单次收益，而在于它能否自我增强？**</a:t>
+            </a:r>
+          </a:p>
+          <a:p>
+            <a:r>
+              <a:rPr lang="en-US" sz="700"/>
+              <a:t>- 问题：**“如果我把这件事持续做三年，它会不会产生一种自己‘跑起来’的惯性？每次行动，是不是都在降低下一次行动的成本，或增加下一次行动的收益？”**</a:t>
+            </a:r>
+          </a:p>
+          <a:p>
+            <a:r>
+              <a:rPr lang="en-US" sz="700"/>
+              <a:t>- 说明：这个问题帮你识别真正的复利——不是简单的“积累”，而是“积累的加速”。</a:t>
+            </a:r>
+          </a:p>
+          <a:p>
+            <a:endParaRPr lang="en-US" sz="700"/>
+          </a:p>
+          <a:p>
+            <a:r>
+              <a:rPr lang="en-US" sz="700"/>
+              <a:t>**5. 二阶思维（看见间接后果）**</a:t>
+            </a:r>
+          </a:p>
+          <a:p>
+            <a:r>
+              <a:rPr lang="en-US" sz="700"/>
+              <a:t>这个问题在问：**你的直觉是否在提醒你，这个行动的直接结果之外，还有一层你不愿面对的连锁反应？**</a:t>
+            </a:r>
+          </a:p>
+          <a:p>
+            <a:r>
+              <a:rPr lang="en-US" sz="700"/>
+              <a:t>- 问题：**“如果这件事做成了，它最可能引发的、非我本意的间接后果是什么？我的直觉是在兴奋于第一层，还是在担忧第二层？”**</a:t>
+            </a:r>
+          </a:p>
+          <a:p>
+            <a:r>
+              <a:rPr lang="en-US" sz="700"/>
+              <a:t>- 说明：这个问题帮你把“隐隐的不安”显性化，防止你只看到眼前的一步。</a:t>
+            </a:r>
+          </a:p>
+          <a:p>
+            <a:endParaRPr lang="en-US" sz="700"/>
+          </a:p>
+          <a:p>
+            <a:r>
+              <a:rPr lang="en-US" sz="700"/>
+              <a:t>---</a:t>
+            </a:r>
+          </a:p>
+          <a:p>
+            <a:endParaRPr lang="en-US" sz="700"/>
+          </a:p>
+          <a:p>
+            <a:r>
+              <a:rPr lang="en-US" sz="700"/>
+              <a:t>### 操作系统：全局元规则（3个问题）</a:t>
+            </a:r>
+          </a:p>
+          <a:p>
+            <a:endParaRPr lang="en-US" sz="700"/>
+          </a:p>
+          <a:p>
+            <a:r>
+              <a:rPr lang="en-US" sz="700"/>
+              <a:t>这部分问题，用于检验你的直觉是否考虑了成本、代价和脆弱性，确保核心引擎的运行是稳健的。</a:t>
+            </a:r>
+          </a:p>
+          <a:p>
+            <a:endParaRPr lang="en-US" sz="700"/>
+          </a:p>
+          <a:p>
+            <a:r>
+              <a:rPr lang="en-US" sz="700"/>
+              <a:t>**6. 战略性懒惰（最小能耗原则）**</a:t>
+            </a:r>
+          </a:p>
+          <a:p>
+            <a:r>
+              <a:rPr lang="en-US" sz="700"/>
+              <a:t>这个问题在问：**你的直觉驱动你的方式，是在帮你省力，还是在让你上瘾于“努力的感觉”？**</a:t>
+            </a:r>
+          </a:p>
+          <a:p>
+            <a:r>
+              <a:rPr lang="en-US" sz="700"/>
+              <a:t>- 问题：**“要达成这个目标，有没有一种更‘懒’的方式？我的直觉是选择了‘坚持努力’，还是选择了一个‘设置一次就自动运行’的系统？”**</a:t>
+            </a:r>
+          </a:p>
+          <a:p>
+            <a:r>
+              <a:rPr lang="en-US" sz="700"/>
+              <a:t>- 说明：这个问题帮你过滤掉那些对意志力成瘾的虚假直觉，引导你寻找高杠杆、低能耗的方案。</a:t>
+            </a:r>
+          </a:p>
+          <a:p>
+            <a:endParaRPr lang="en-US" sz="700"/>
+          </a:p>
+          <a:p>
+            <a:r>
+              <a:rPr lang="en-US" sz="700"/>
+              <a:t>**7. 机会成本（看见被放弃的价值）**</a:t>
+            </a:r>
+          </a:p>
+          <a:p>
+            <a:r>
+              <a:rPr lang="en-US" sz="700"/>
+              <a:t>这个问题在问：**你的直觉在选择A的时候，是否让你清晰地感受到了B的代价？**</a:t>
+            </a:r>
+          </a:p>
+          <a:p>
+            <a:r>
+              <a:rPr lang="en-US" sz="700"/>
+              <a:t>- 问题：**“选了这条路，我最舍不得的是什么？我的直觉是闭着眼睛往前冲，还是清醒地掂量着那个被放弃的东西？”**</a:t>
+            </a:r>
+          </a:p>
+          <a:p>
+            <a:r>
+              <a:rPr lang="en-US" sz="700"/>
+              <a:t>- 说明：这个问题帮你检验直觉是否经过了权衡。一个没有经过“失去感”检验的直觉，往往是冲动的。</a:t>
+            </a:r>
+          </a:p>
+          <a:p>
+            <a:endParaRPr lang="en-US" sz="700"/>
+          </a:p>
+          <a:p>
+            <a:r>
+              <a:rPr lang="en-US" sz="700"/>
+              <a:t>**8. 逆向思维（主动寻找反证）**</a:t>
+            </a:r>
+          </a:p>
+          <a:p>
+            <a:r>
+              <a:rPr lang="en-US" sz="700"/>
+              <a:t>这个问题在问：**你的直觉是否经得起一个简单的“反向测试”？**</a:t>
+            </a:r>
+          </a:p>
+          <a:p>
+            <a:r>
+              <a:rPr lang="en-US" sz="700"/>
+              <a:t>- 问题：**“如果我的直觉是错的，最可能的、我还没看到的证据是什么？如果我铁了心要让这个计划失败，我第一件会做的是什么？”**</a:t>
+            </a:r>
+          </a:p>
+          <a:p>
+            <a:r>
+              <a:rPr lang="en-US" sz="700"/>
+              <a:t>- 说明：这个问题直接检验模型的容错性。一个没想过“自己怎么死”的直觉，是脆弱的。</a:t>
+            </a:r>
+          </a:p>
+        </p:txBody>
+      </p:sp>
     </p:spTree>
     <p:extLst>
       <p:ext uri="{BB962C8B-B14F-4D97-AF65-F5344CB8AC3E}">
